--- a/1개월차_3매_망분리_AI활용체계.pptx
+++ b/1개월차_3매_망분리_AI활용체계.pptx
@@ -502,7 +502,7 @@
           <a:p>
             <a:r>
               <a:rPr lang="en-US" dirty="0"/>
-              <a:t>내부망에서는 외부 AI를 직접 쓸 수 없으므로, 형상관리 저장소를 맥락 매개체로 삼아 코드와 문서만 주고받는 방식으로 운영했다. 저장소에 값의 결정 근거와 검증 상태를 남겨두기 때문에 매 세션 같은 설명을 반복하지 않고 이어서 작업할 수 있다.</a:t>
+              <a:t>보안 정책상 CAD·해석 모델과 원본 결과는 외부로 나갈 수 없다. 따라서 외부에서는 코드와 문서만 작성하고, 형상 생성과 해석은 전적으로 내부망에서 수행한다. 실행 결과는 개발자가 확인한 뒤 필요한 요구사항만 정리해 전달하는 방식으로 운영했다.</a:t>
             </a:r>
             <a:endParaRPr lang="en-US" dirty="0"/>
           </a:p>
@@ -1141,7 +1141,7 @@
                 <a:gridCol w="1051560"/>
                 <a:gridCol w="3794760"/>
               </a:tblGrid>
-              <a:tr h="347472">
+              <a:tr h="310896">
                 <a:tc>
                   <a:txBody>
                     <a:bodyPr/>
@@ -1243,7 +1243,7 @@
                   </a:tcPr>
                 </a:tc>
               </a:tr>
-              <a:tr h="347472">
+              <a:tr h="310896">
                 <a:tc>
                   <a:txBody>
                     <a:bodyPr/>
@@ -1339,7 +1339,7 @@
                   </a:tcPr>
                 </a:tc>
               </a:tr>
-              <a:tr h="347472">
+              <a:tr h="310896">
                 <a:tc>
                   <a:txBody>
                     <a:bodyPr/>
@@ -1357,7 +1357,7 @@
                           <a:ea typeface="Malgun Gothic" pitchFamily="34" charset="-122"/>
                           <a:cs typeface="Malgun Gothic" pitchFamily="34" charset="-120"/>
                         </a:rPr>
-                        <a:t>해석 환경</a:t>
+                        <a:t>반출 제한</a:t>
                       </a:r>
                       <a:endParaRPr lang="en-US" sz="950" dirty="0">
                         <a:latin typeface="Malgun Gothic" charset="0"/>
@@ -1404,7 +1404,7 @@
                           <a:ea typeface="Malgun Gothic" pitchFamily="34" charset="-122"/>
                           <a:cs typeface="Malgun Gothic" pitchFamily="34" charset="-120"/>
                         </a:rPr>
-                        <a:t>CAD·해석 프로그램과 원본 데이터는 내부망에만 존재</a:t>
+                        <a:t>CAD·해석 모델 및 원본 결과는 반출 불가</a:t>
                       </a:r>
                       <a:endParaRPr lang="en-US" sz="950" dirty="0">
                         <a:latin typeface="Malgun Gothic" charset="0"/>
@@ -1435,7 +1435,7 @@
                   </a:tcPr>
                 </a:tc>
               </a:tr>
-              <a:tr h="347472">
+              <a:tr h="310896">
                 <a:tc>
                   <a:txBody>
                     <a:bodyPr/>
@@ -1500,7 +1500,7 @@
                           <a:ea typeface="Malgun Gothic" pitchFamily="34" charset="-122"/>
                           <a:cs typeface="Malgun Gothic" pitchFamily="34" charset="-120"/>
                         </a:rPr>
-                        <a:t>AI를 내부망에 들이지 않고 개발하는 방법</a:t>
+                        <a:t>내부 자산을 내보내지 않고 개발하는 방법</a:t>
                       </a:r>
                       <a:endParaRPr lang="en-US" sz="950" dirty="0">
                         <a:latin typeface="Malgun Gothic" charset="0"/>
@@ -1537,14 +1537,41 @@
       </p:graphicFrame>
       <p:sp>
         <p:nvSpPr>
-          <p:cNvPr id="10" name="Text 7"/>
+          <p:cNvPr id="10" name="Shape 7"/>
+          <p:cNvSpPr/>
+          <p:nvPr/>
+        </p:nvSpPr>
+        <p:spPr>
+          <a:xfrm>
+            <a:off x="813816" y="3218688"/>
+            <a:ext cx="4846320" cy="384048"/>
+          </a:xfrm>
+          <a:prstGeom prst="roundRect">
+            <a:avLst>
+              <a:gd name="adj" fmla="val 14286"/>
+            </a:avLst>
+          </a:prstGeom>
+          <a:solidFill>
+            <a:srgbClr val="EEF2F7"/>
+          </a:solidFill>
+          <a:ln w="12700">
+            <a:solidFill>
+              <a:srgbClr val="EEF2F7"/>
+            </a:solidFill>
+            <a:prstDash val="solid"/>
+          </a:ln>
+        </p:spPr>
+      </p:sp>
+      <p:sp>
+        <p:nvSpPr>
+          <p:cNvPr id="11" name="Text 8"/>
           <p:cNvSpPr txBox="1"/>
           <p:nvPr/>
         </p:nvSpPr>
         <p:spPr>
           <a:xfrm>
-            <a:off x="813816" y="3364992"/>
-            <a:ext cx="4846320" cy="237744"/>
+            <a:off x="941832" y="3218688"/>
+            <a:ext cx="4617720" cy="384048"/>
           </a:xfrm>
           <a:prstGeom prst="rect">
             <a:avLst/>
@@ -1560,15 +1587,15 @@
               <a:buNone/>
             </a:pPr>
             <a:r>
-              <a:rPr lang="en-US" sz="950" i="1" dirty="0">
+              <a:rPr lang="en-US" sz="950" b="1" dirty="0">
                 <a:solidFill>
-                  <a:srgbClr val="6B7A8F"/>
+                  <a:srgbClr val="16305B"/>
                 </a:solidFill>
                 <a:latin typeface="Malgun Gothic" pitchFamily="34" charset="0"/>
                 <a:ea typeface="Malgun Gothic" pitchFamily="34" charset="-122"/>
                 <a:cs typeface="Malgun Gothic" pitchFamily="34" charset="-120"/>
               </a:rPr>
-              <a:t>※ 반출·반입은 사내 보안 절차에 따라 수행</a:t>
+              <a:t>→  외부에서 만드는 것은 '코드'이고, 형상과 해석은 내부망에서만 수행</a:t>
             </a:r>
             <a:endParaRPr lang="en-US" sz="950" dirty="0"/>
           </a:p>
@@ -1576,7 +1603,7 @@
       </p:sp>
       <p:sp>
         <p:nvSpPr>
-          <p:cNvPr id="11" name="Shape 8"/>
+          <p:cNvPr id="12" name="Shape 9"/>
           <p:cNvSpPr/>
           <p:nvPr/>
         </p:nvSpPr>
@@ -1610,7 +1637,7 @@
       </p:sp>
       <p:sp>
         <p:nvSpPr>
-          <p:cNvPr id="12" name="Shape 9"/>
+          <p:cNvPr id="13" name="Shape 10"/>
           <p:cNvSpPr/>
           <p:nvPr/>
         </p:nvSpPr>
@@ -1635,7 +1662,7 @@
       </p:sp>
       <p:sp>
         <p:nvSpPr>
-          <p:cNvPr id="13" name="Text 10"/>
+          <p:cNvPr id="14" name="Text 11"/>
           <p:cNvSpPr txBox="1"/>
           <p:nvPr/>
         </p:nvSpPr>
@@ -1674,14 +1701,14 @@
       </p:sp>
       <p:sp>
         <p:nvSpPr>
-          <p:cNvPr id="14" name="Text 11"/>
+          <p:cNvPr id="15" name="Text 12"/>
           <p:cNvSpPr txBox="1"/>
           <p:nvPr/>
         </p:nvSpPr>
         <p:spPr>
           <a:xfrm>
-            <a:off x="6702552" y="1828800"/>
-            <a:ext cx="2103120" cy="219456"/>
+            <a:off x="6647688" y="1847088"/>
+            <a:ext cx="1828800" cy="201168"/>
           </a:xfrm>
           <a:prstGeom prst="rect">
             <a:avLst/>
@@ -1693,7 +1720,46 @@
           <a:bodyPr wrap="square" lIns="0" tIns="0" rIns="0" bIns="0" rtlCol="0" anchor="ctr"/>
           <a:lstStyle/>
           <a:p>
-            <a:pPr algn="ctr" indent="0" marL="0">
+            <a:pPr algn="l" indent="0" marL="0">
+              <a:buNone/>
+            </a:pPr>
+            <a:r>
+              <a:rPr lang="en-US" sz="900" b="1" spc="100" kern="0" dirty="0">
+                <a:solidFill>
+                  <a:srgbClr val="6B7A8F"/>
+                </a:solidFill>
+                <a:latin typeface="Malgun Gothic" pitchFamily="34" charset="0"/>
+                <a:ea typeface="Malgun Gothic" pitchFamily="34" charset="-122"/>
+                <a:cs typeface="Malgun Gothic" pitchFamily="34" charset="-120"/>
+              </a:rPr>
+              <a:t>외부 (개발)</a:t>
+            </a:r>
+            <a:endParaRPr lang="en-US" sz="900" dirty="0"/>
+          </a:p>
+        </p:txBody>
+      </p:sp>
+      <p:sp>
+        <p:nvSpPr>
+          <p:cNvPr id="16" name="Text 13"/>
+          <p:cNvSpPr txBox="1"/>
+          <p:nvPr/>
+        </p:nvSpPr>
+        <p:spPr>
+          <a:xfrm>
+            <a:off x="9665208" y="1847088"/>
+            <a:ext cx="1828800" cy="201168"/>
+          </a:xfrm>
+          <a:prstGeom prst="rect">
+            <a:avLst/>
+          </a:prstGeom>
+          <a:noFill/>
+          <a:ln/>
+        </p:spPr>
+        <p:txBody>
+          <a:bodyPr wrap="square" lIns="0" tIns="0" rIns="0" bIns="0" rtlCol="0" anchor="ctr"/>
+          <a:lstStyle/>
+          <a:p>
+            <a:pPr algn="r" indent="0" marL="0">
               <a:buNone/>
             </a:pPr>
             <a:r>
@@ -1713,14 +1779,64 @@
       </p:sp>
       <p:sp>
         <p:nvSpPr>
-          <p:cNvPr id="15" name="Text 12"/>
+          <p:cNvPr id="17" name="Shape 14"/>
+          <p:cNvSpPr/>
+          <p:nvPr/>
+        </p:nvSpPr>
+        <p:spPr>
+          <a:xfrm>
+            <a:off x="9665208" y="1810512"/>
+            <a:ext cx="0" cy="1444752"/>
+          </a:xfrm>
+          <a:prstGeom prst="line">
+            <a:avLst/>
+          </a:prstGeom>
+          <a:noFill/>
+          <a:ln w="15875">
+            <a:solidFill>
+              <a:srgbClr val="B9C4D2"/>
+            </a:solidFill>
+            <a:prstDash val="dash"/>
+          </a:ln>
+        </p:spPr>
+      </p:sp>
+      <p:sp>
+        <p:nvSpPr>
+          <p:cNvPr id="18" name="Shape 15"/>
+          <p:cNvSpPr/>
+          <p:nvPr/>
+        </p:nvSpPr>
+        <p:spPr>
+          <a:xfrm>
+            <a:off x="6647688" y="2121408"/>
+            <a:ext cx="1371600" cy="457200"/>
+          </a:xfrm>
+          <a:prstGeom prst="roundRect">
+            <a:avLst>
+              <a:gd name="adj" fmla="val 14000"/>
+            </a:avLst>
+          </a:prstGeom>
+          <a:solidFill>
+            <a:srgbClr val="00A3C4"/>
+          </a:solidFill>
+          <a:ln w="15875">
+            <a:solidFill>
+              <a:srgbClr val="00A3C4"/>
+            </a:solidFill>
+            <a:prstDash val="solid"/>
+          </a:ln>
+        </p:spPr>
+      </p:sp>
+      <p:sp>
+        <p:nvSpPr>
+          <p:cNvPr id="19" name="Text 16"/>
           <p:cNvSpPr txBox="1"/>
           <p:nvPr/>
         </p:nvSpPr>
         <p:spPr>
           <a:xfrm>
-            <a:off x="9308592" y="1828800"/>
-            <a:ext cx="2103120" cy="219456"/>
+            <a:off x="6647688" y="2121408"/>
+            <a:ext cx="1371600" cy="457200"/>
           </a:xfrm>
           <a:prstGeom prst="rect">
             <a:avLst/>
@@ -1733,66 +1849,46 @@
           <a:lstStyle/>
           <a:p>
             <a:pPr algn="ctr" indent="0" marL="0">
+              <a:lnSpc>
+                <a:spcPct val="95000"/>
+              </a:lnSpc>
               <a:buNone/>
             </a:pPr>
             <a:r>
-              <a:rPr lang="en-US" sz="900" b="1" spc="100" kern="0" dirty="0">
+              <a:rPr lang="en-US" sz="1000" b="1" dirty="0">
                 <a:solidFill>
-                  <a:srgbClr val="6B7A8F"/>
+                  <a:srgbClr val="FFFFFF"/>
                 </a:solidFill>
                 <a:latin typeface="Malgun Gothic" pitchFamily="34" charset="0"/>
                 <a:ea typeface="Malgun Gothic" pitchFamily="34" charset="-122"/>
                 <a:cs typeface="Malgun Gothic" pitchFamily="34" charset="-120"/>
               </a:rPr>
-              <a:t>외부 (개발)</a:t>
+              <a:t>AI 에이전트</a:t>
             </a:r>
-            <a:endParaRPr lang="en-US" sz="900" dirty="0"/>
+            <a:endParaRPr lang="en-US" sz="1000" dirty="0"/>
           </a:p>
         </p:txBody>
       </p:sp>
       <p:sp>
         <p:nvSpPr>
-          <p:cNvPr id="16" name="Shape 13"/>
+          <p:cNvPr id="20" name="Shape 17"/>
           <p:cNvSpPr/>
           <p:nvPr/>
         </p:nvSpPr>
         <p:spPr>
           <a:xfrm>
-            <a:off x="9057132" y="1792224"/>
-            <a:ext cx="0" cy="1572768"/>
-          </a:xfrm>
-          <a:prstGeom prst="line">
-            <a:avLst/>
-          </a:prstGeom>
-          <a:noFill/>
-          <a:ln w="12700">
-            <a:solidFill>
-              <a:srgbClr val="B9C4D2"/>
-            </a:solidFill>
-            <a:prstDash val="dash"/>
-          </a:ln>
-        </p:spPr>
-      </p:sp>
-      <p:sp>
-        <p:nvSpPr>
-          <p:cNvPr id="17" name="Shape 14"/>
-          <p:cNvSpPr/>
-          <p:nvPr/>
-        </p:nvSpPr>
-        <p:spPr>
-          <a:xfrm>
-            <a:off x="6702552" y="2066544"/>
-            <a:ext cx="2103120" cy="475488"/>
+            <a:off x="8202168" y="2121408"/>
+            <a:ext cx="1371600" cy="457200"/>
           </a:xfrm>
           <a:prstGeom prst="roundRect">
             <a:avLst>
-              <a:gd name="adj" fmla="val 13462"/>
+              <a:gd name="adj" fmla="val 14000"/>
             </a:avLst>
           </a:prstGeom>
           <a:solidFill>
-            <a:srgbClr val="16305B"/>
+            <a:srgbClr val="FFFFFF"/>
           </a:solidFill>
-          <a:ln w="12700">
+          <a:ln w="15875">
             <a:solidFill>
               <a:srgbClr val="16305B"/>
             </a:solidFill>
@@ -1802,14 +1898,14 @@
       </p:sp>
       <p:sp>
         <p:nvSpPr>
-          <p:cNvPr id="18" name="Text 15"/>
+          <p:cNvPr id="21" name="Text 18"/>
           <p:cNvSpPr txBox="1"/>
           <p:nvPr/>
         </p:nvSpPr>
         <p:spPr>
           <a:xfrm>
-            <a:off x="6702552" y="2066544"/>
-            <a:ext cx="2103120" cy="475488"/>
+            <a:off x="8202168" y="2121408"/>
+            <a:ext cx="1371600" cy="457200"/>
           </a:xfrm>
           <a:prstGeom prst="rect">
             <a:avLst/>
@@ -1822,6 +1918,98 @@
           <a:lstStyle/>
           <a:p>
             <a:pPr algn="ctr" indent="0" marL="0">
+              <a:lnSpc>
+                <a:spcPct val="95000"/>
+              </a:lnSpc>
+              <a:buNone/>
+            </a:pPr>
+            <a:r>
+              <a:rPr lang="en-US" sz="900" b="1" dirty="0">
+                <a:solidFill>
+                  <a:srgbClr val="16305B"/>
+                </a:solidFill>
+                <a:latin typeface="Malgun Gothic" pitchFamily="34" charset="0"/>
+                <a:ea typeface="Malgun Gothic" pitchFamily="34" charset="-122"/>
+                <a:cs typeface="Malgun Gothic" pitchFamily="34" charset="-120"/>
+              </a:rPr>
+              <a:t>저장소</a:t>
+            </a:r>
+            <a:endParaRPr lang="en-US" sz="900" dirty="0"/>
+          </a:p>
+          <a:p>
+            <a:pPr algn="ctr" indent="0" marL="0">
+              <a:lnSpc>
+                <a:spcPct val="95000"/>
+              </a:lnSpc>
+              <a:buNone/>
+            </a:pPr>
+            <a:r>
+              <a:rPr lang="en-US" sz="900" b="1" dirty="0">
+                <a:solidFill>
+                  <a:srgbClr val="16305B"/>
+                </a:solidFill>
+                <a:latin typeface="Malgun Gothic" pitchFamily="34" charset="0"/>
+                <a:ea typeface="Malgun Gothic" pitchFamily="34" charset="-122"/>
+                <a:cs typeface="Malgun Gothic" pitchFamily="34" charset="-120"/>
+              </a:rPr>
+              <a:t>(코드 · 문서)</a:t>
+            </a:r>
+            <a:endParaRPr lang="en-US" sz="900" dirty="0"/>
+          </a:p>
+        </p:txBody>
+      </p:sp>
+      <p:sp>
+        <p:nvSpPr>
+          <p:cNvPr id="22" name="Shape 19"/>
+          <p:cNvSpPr/>
+          <p:nvPr/>
+        </p:nvSpPr>
+        <p:spPr>
+          <a:xfrm>
+            <a:off x="9756648" y="2121408"/>
+            <a:ext cx="1371600" cy="457200"/>
+          </a:xfrm>
+          <a:prstGeom prst="roundRect">
+            <a:avLst>
+              <a:gd name="adj" fmla="val 14000"/>
+            </a:avLst>
+          </a:prstGeom>
+          <a:solidFill>
+            <a:srgbClr val="16305B"/>
+          </a:solidFill>
+          <a:ln w="15875">
+            <a:solidFill>
+              <a:srgbClr val="16305B"/>
+            </a:solidFill>
+            <a:prstDash val="solid"/>
+          </a:ln>
+        </p:spPr>
+      </p:sp>
+      <p:sp>
+        <p:nvSpPr>
+          <p:cNvPr id="23" name="Text 20"/>
+          <p:cNvSpPr txBox="1"/>
+          <p:nvPr/>
+        </p:nvSpPr>
+        <p:spPr>
+          <a:xfrm>
+            <a:off x="9756648" y="2121408"/>
+            <a:ext cx="1371600" cy="457200"/>
+          </a:xfrm>
+          <a:prstGeom prst="rect">
+            <a:avLst/>
+          </a:prstGeom>
+          <a:noFill/>
+          <a:ln/>
+        </p:spPr>
+        <p:txBody>
+          <a:bodyPr wrap="square" lIns="0" tIns="0" rIns="0" bIns="0" rtlCol="0" anchor="ctr"/>
+          <a:lstStyle/>
+          <a:p>
+            <a:pPr algn="ctr" indent="0" marL="0">
+              <a:lnSpc>
+                <a:spcPct val="95000"/>
+              </a:lnSpc>
               <a:buNone/>
             </a:pPr>
             <a:r>
@@ -1841,41 +2029,62 @@
       </p:sp>
       <p:sp>
         <p:nvSpPr>
-          <p:cNvPr id="19" name="Shape 16"/>
+          <p:cNvPr id="24" name="Shape 21"/>
           <p:cNvSpPr/>
           <p:nvPr/>
         </p:nvSpPr>
         <p:spPr>
           <a:xfrm>
-            <a:off x="9308592" y="2066544"/>
-            <a:ext cx="2103120" cy="475488"/>
-          </a:xfrm>
-          <a:prstGeom prst="roundRect">
-            <a:avLst>
-              <a:gd name="adj" fmla="val 13462"/>
-            </a:avLst>
-          </a:prstGeom>
-          <a:solidFill>
-            <a:srgbClr val="00A3C4"/>
-          </a:solidFill>
-          <a:ln w="12700">
+            <a:off x="8019288" y="2350008"/>
+            <a:ext cx="182880" cy="0"/>
+          </a:xfrm>
+          <a:prstGeom prst="line">
+            <a:avLst/>
+          </a:prstGeom>
+          <a:noFill/>
+          <a:ln w="15875">
             <a:solidFill>
-              <a:srgbClr val="00A3C4"/>
+              <a:srgbClr val="16305B"/>
             </a:solidFill>
             <a:prstDash val="solid"/>
+            <a:tailEnd type="triangle"/>
           </a:ln>
         </p:spPr>
       </p:sp>
       <p:sp>
         <p:nvSpPr>
-          <p:cNvPr id="20" name="Text 17"/>
+          <p:cNvPr id="25" name="Shape 22"/>
+          <p:cNvSpPr/>
+          <p:nvPr/>
+        </p:nvSpPr>
+        <p:spPr>
+          <a:xfrm>
+            <a:off x="9573768" y="2350008"/>
+            <a:ext cx="182880" cy="0"/>
+          </a:xfrm>
+          <a:prstGeom prst="line">
+            <a:avLst/>
+          </a:prstGeom>
+          <a:noFill/>
+          <a:ln w="15875">
+            <a:solidFill>
+              <a:srgbClr val="16305B"/>
+            </a:solidFill>
+            <a:prstDash val="solid"/>
+            <a:tailEnd type="triangle"/>
+          </a:ln>
+        </p:spPr>
+      </p:sp>
+      <p:sp>
+        <p:nvSpPr>
+          <p:cNvPr id="26" name="Text 23"/>
           <p:cNvSpPr txBox="1"/>
           <p:nvPr/>
         </p:nvSpPr>
         <p:spPr>
           <a:xfrm>
-            <a:off x="9308592" y="2066544"/>
-            <a:ext cx="2103120" cy="475488"/>
+            <a:off x="8942832" y="2606040"/>
+            <a:ext cx="1325880" cy="201168"/>
           </a:xfrm>
           <a:prstGeom prst="rect">
             <a:avLst/>
@@ -1891,42 +2100,38 @@
               <a:buNone/>
             </a:pPr>
             <a:r>
-              <a:rPr lang="en-US" sz="1000" b="1" dirty="0">
+              <a:rPr lang="en-US" sz="800" dirty="0">
                 <a:solidFill>
-                  <a:srgbClr val="FFFFFF"/>
+                  <a:srgbClr val="16305B"/>
                 </a:solidFill>
                 <a:latin typeface="Malgun Gothic" pitchFamily="34" charset="0"/>
                 <a:ea typeface="Malgun Gothic" pitchFamily="34" charset="-122"/>
                 <a:cs typeface="Malgun Gothic" pitchFamily="34" charset="-120"/>
               </a:rPr>
-              <a:t>AI 에이전트</a:t>
+              <a:t>코드 · 문서 반입</a:t>
             </a:r>
-            <a:endParaRPr lang="en-US" sz="1000" dirty="0"/>
+            <a:endParaRPr lang="en-US" sz="800" dirty="0"/>
           </a:p>
         </p:txBody>
       </p:sp>
       <p:sp>
         <p:nvSpPr>
-          <p:cNvPr id="21" name="Shape 18"/>
+          <p:cNvPr id="27" name="Shape 24"/>
           <p:cNvSpPr/>
           <p:nvPr/>
         </p:nvSpPr>
         <p:spPr>
           <a:xfrm>
-            <a:off x="7205472" y="2926080"/>
-            <a:ext cx="3703320" cy="457200"/>
-          </a:xfrm>
-          <a:prstGeom prst="roundRect">
-            <a:avLst>
-              <a:gd name="adj" fmla="val 14000"/>
-            </a:avLst>
-          </a:prstGeom>
-          <a:solidFill>
-            <a:srgbClr val="FFFFFF"/>
-          </a:solidFill>
-          <a:ln w="15875">
+            <a:off x="10442448" y="2578608"/>
+            <a:ext cx="0" cy="365760"/>
+          </a:xfrm>
+          <a:prstGeom prst="line">
+            <a:avLst/>
+          </a:prstGeom>
+          <a:noFill/>
+          <a:ln w="13970">
             <a:solidFill>
-              <a:srgbClr val="16305B"/>
+              <a:srgbClr val="6B7A8F"/>
             </a:solidFill>
             <a:prstDash val="solid"/>
           </a:ln>
@@ -1934,14 +2139,62 @@
       </p:sp>
       <p:sp>
         <p:nvSpPr>
-          <p:cNvPr id="22" name="Text 19"/>
+          <p:cNvPr id="28" name="Shape 25"/>
+          <p:cNvSpPr/>
+          <p:nvPr/>
+        </p:nvSpPr>
+        <p:spPr>
+          <a:xfrm>
+            <a:off x="7333488" y="2944368"/>
+            <a:ext cx="3108960" cy="0"/>
+          </a:xfrm>
+          <a:prstGeom prst="line">
+            <a:avLst/>
+          </a:prstGeom>
+          <a:noFill/>
+          <a:ln w="13970">
+            <a:solidFill>
+              <a:srgbClr val="6B7A8F"/>
+            </a:solidFill>
+            <a:prstDash val="solid"/>
+            <a:headEnd type="triangle"/>
+          </a:ln>
+        </p:spPr>
+      </p:sp>
+      <p:sp>
+        <p:nvSpPr>
+          <p:cNvPr id="29" name="Shape 26"/>
+          <p:cNvSpPr/>
+          <p:nvPr/>
+        </p:nvSpPr>
+        <p:spPr>
+          <a:xfrm>
+            <a:off x="7333488" y="2578608"/>
+            <a:ext cx="0" cy="365760"/>
+          </a:xfrm>
+          <a:prstGeom prst="line">
+            <a:avLst/>
+          </a:prstGeom>
+          <a:noFill/>
+          <a:ln w="13970">
+            <a:solidFill>
+              <a:srgbClr val="6B7A8F"/>
+            </a:solidFill>
+            <a:prstDash val="solid"/>
+            <a:headEnd type="triangle"/>
+          </a:ln>
+        </p:spPr>
+      </p:sp>
+      <p:sp>
+        <p:nvSpPr>
+          <p:cNvPr id="30" name="Text 27"/>
           <p:cNvSpPr txBox="1"/>
           <p:nvPr/>
         </p:nvSpPr>
         <p:spPr>
           <a:xfrm>
-            <a:off x="7205472" y="2926080"/>
-            <a:ext cx="3703320" cy="457200"/>
+            <a:off x="6647688" y="2980944"/>
+            <a:ext cx="4846320" cy="219456"/>
           </a:xfrm>
           <a:prstGeom prst="rect">
             <a:avLst/>
@@ -1957,104 +2210,15 @@
               <a:buNone/>
             </a:pPr>
             <a:r>
-              <a:rPr lang="en-US" sz="1050" b="1" dirty="0">
+              <a:rPr lang="en-US" sz="850" dirty="0">
                 <a:solidFill>
-                  <a:srgbClr val="16305B"/>
+                  <a:srgbClr val="6B7A8F"/>
                 </a:solidFill>
                 <a:latin typeface="Malgun Gothic" pitchFamily="34" charset="0"/>
                 <a:ea typeface="Malgun Gothic" pitchFamily="34" charset="-122"/>
                 <a:cs typeface="Malgun Gothic" pitchFamily="34" charset="-120"/>
               </a:rPr>
-              <a:t>형상관리 저장소 (GitHub)</a:t>
-            </a:r>
-            <a:endParaRPr lang="en-US" sz="1050" dirty="0"/>
-          </a:p>
-        </p:txBody>
-      </p:sp>
-      <p:sp>
-        <p:nvSpPr>
-          <p:cNvPr id="23" name="Shape 20"/>
-          <p:cNvSpPr/>
-          <p:nvPr/>
-        </p:nvSpPr>
-        <p:spPr>
-          <a:xfrm>
-            <a:off x="7754112" y="2542032"/>
-            <a:ext cx="0" cy="384048"/>
-          </a:xfrm>
-          <a:prstGeom prst="line">
-            <a:avLst/>
-          </a:prstGeom>
-          <a:noFill/>
-          <a:ln w="15875">
-            <a:solidFill>
-              <a:srgbClr val="16305B"/>
-            </a:solidFill>
-            <a:prstDash val="solid"/>
-            <a:headEnd type="triangle"/>
-            <a:tailEnd type="triangle"/>
-          </a:ln>
-        </p:spPr>
-      </p:sp>
-      <p:sp>
-        <p:nvSpPr>
-          <p:cNvPr id="24" name="Shape 21"/>
-          <p:cNvSpPr/>
-          <p:nvPr/>
-        </p:nvSpPr>
-        <p:spPr>
-          <a:xfrm>
-            <a:off x="10360152" y="2542032"/>
-            <a:ext cx="0" cy="384048"/>
-          </a:xfrm>
-          <a:prstGeom prst="line">
-            <a:avLst/>
-          </a:prstGeom>
-          <a:noFill/>
-          <a:ln w="15875">
-            <a:solidFill>
-              <a:srgbClr val="00A3C4"/>
-            </a:solidFill>
-            <a:prstDash val="solid"/>
-            <a:headEnd type="triangle"/>
-            <a:tailEnd type="triangle"/>
-          </a:ln>
-        </p:spPr>
-      </p:sp>
-      <p:sp>
-        <p:nvSpPr>
-          <p:cNvPr id="25" name="Text 22"/>
-          <p:cNvSpPr txBox="1"/>
-          <p:nvPr/>
-        </p:nvSpPr>
-        <p:spPr>
-          <a:xfrm>
-            <a:off x="7854696" y="2560320"/>
-            <a:ext cx="1097280" cy="274320"/>
-          </a:xfrm>
-          <a:prstGeom prst="rect">
-            <a:avLst/>
-          </a:prstGeom>
-          <a:noFill/>
-          <a:ln/>
-        </p:spPr>
-        <p:txBody>
-          <a:bodyPr wrap="square" lIns="0" tIns="0" rIns="0" bIns="0" rtlCol="0" anchor="ctr"/>
-          <a:lstStyle/>
-          <a:p>
-            <a:pPr indent="0" marL="0">
-              <a:buNone/>
-            </a:pPr>
-            <a:r>
-              <a:rPr lang="en-US" sz="850" dirty="0">
-                <a:solidFill>
-                  <a:srgbClr val="16305B"/>
-                </a:solidFill>
-                <a:latin typeface="Malgun Gothic" pitchFamily="34" charset="0"/>
-                <a:ea typeface="Malgun Gothic" pitchFamily="34" charset="-122"/>
-                <a:cs typeface="Malgun Gothic" pitchFamily="34" charset="-120"/>
-              </a:rPr>
-              <a:t>반출 / 반입</a:t>
+              <a:t>개발자가 결과를 확인하고 요구사항만 정리해 전달</a:t>
             </a:r>
             <a:endParaRPr lang="en-US" sz="850" dirty="0"/>
           </a:p>
@@ -2062,53 +2226,41 @@
       </p:sp>
       <p:sp>
         <p:nvSpPr>
-          <p:cNvPr id="26" name="Text 23"/>
+          <p:cNvPr id="31" name="Shape 28"/>
+          <p:cNvSpPr/>
+          <p:nvPr/>
+        </p:nvSpPr>
+        <p:spPr>
+          <a:xfrm>
+            <a:off x="6647688" y="3273552"/>
+            <a:ext cx="4846320" cy="292608"/>
+          </a:xfrm>
+          <a:prstGeom prst="roundRect">
+            <a:avLst>
+              <a:gd name="adj" fmla="val 15625"/>
+            </a:avLst>
+          </a:prstGeom>
+          <a:solidFill>
+            <a:srgbClr val="EEF2F7"/>
+          </a:solidFill>
+          <a:ln w="12700">
+            <a:solidFill>
+              <a:srgbClr val="EEF2F7"/>
+            </a:solidFill>
+            <a:prstDash val="solid"/>
+          </a:ln>
+        </p:spPr>
+      </p:sp>
+      <p:sp>
+        <p:nvSpPr>
+          <p:cNvPr id="32" name="Text 29"/>
           <p:cNvSpPr txBox="1"/>
           <p:nvPr/>
         </p:nvSpPr>
         <p:spPr>
           <a:xfrm>
-            <a:off x="9445752" y="2560320"/>
-            <a:ext cx="859536" cy="274320"/>
-          </a:xfrm>
-          <a:prstGeom prst="rect">
-            <a:avLst/>
-          </a:prstGeom>
-          <a:noFill/>
-          <a:ln/>
-        </p:spPr>
-        <p:txBody>
-          <a:bodyPr wrap="square" lIns="0" tIns="0" rIns="0" bIns="0" rtlCol="0" anchor="ctr"/>
-          <a:lstStyle/>
-          <a:p>
-            <a:pPr algn="r" indent="0" marL="0">
-              <a:buNone/>
-            </a:pPr>
-            <a:r>
-              <a:rPr lang="en-US" sz="850" dirty="0">
-                <a:solidFill>
-                  <a:srgbClr val="00A3C4"/>
-                </a:solidFill>
-                <a:latin typeface="Malgun Gothic" pitchFamily="34" charset="0"/>
-                <a:ea typeface="Malgun Gothic" pitchFamily="34" charset="-122"/>
-                <a:cs typeface="Malgun Gothic" pitchFamily="34" charset="-120"/>
-              </a:rPr>
-              <a:t>읽기 / 반영</a:t>
-            </a:r>
-            <a:endParaRPr lang="en-US" sz="850" dirty="0"/>
-          </a:p>
-        </p:txBody>
-      </p:sp>
-      <p:sp>
-        <p:nvSpPr>
-          <p:cNvPr id="27" name="Text 24"/>
-          <p:cNvSpPr txBox="1"/>
-          <p:nvPr/>
-        </p:nvSpPr>
-        <p:spPr>
-          <a:xfrm>
-            <a:off x="6647688" y="3438144"/>
-            <a:ext cx="4846320" cy="219456"/>
+            <a:off x="6647688" y="3273552"/>
+            <a:ext cx="4846320" cy="292608"/>
           </a:xfrm>
           <a:prstGeom prst="rect">
             <a:avLst/>
@@ -2124,23 +2276,23 @@
               <a:buNone/>
             </a:pPr>
             <a:r>
-              <a:rPr lang="en-US" sz="950" i="1" dirty="0">
+              <a:rPr lang="en-US" sz="900" b="1" dirty="0">
                 <a:solidFill>
-                  <a:srgbClr val="6B7A8F"/>
+                  <a:srgbClr val="16305B"/>
                 </a:solidFill>
                 <a:latin typeface="Malgun Gothic" pitchFamily="34" charset="0"/>
                 <a:ea typeface="Malgun Gothic" pitchFamily="34" charset="-122"/>
                 <a:cs typeface="Malgun Gothic" pitchFamily="34" charset="-120"/>
               </a:rPr>
-              <a:t>저장소를 매개로 맥락 전달 — AI는 내부망에 접속하지 않음</a:t>
+              <a:t>형상·해석 모델과 원본 결과는 경계를 넘지 않음</a:t>
             </a:r>
-            <a:endParaRPr lang="en-US" sz="950" dirty="0"/>
+            <a:endParaRPr lang="en-US" sz="900" dirty="0"/>
           </a:p>
         </p:txBody>
       </p:sp>
       <p:sp>
         <p:nvSpPr>
-          <p:cNvPr id="28" name="Shape 25"/>
+          <p:cNvPr id="33" name="Shape 30"/>
           <p:cNvSpPr/>
           <p:nvPr/>
         </p:nvSpPr>
@@ -2174,7 +2326,7 @@
       </p:sp>
       <p:sp>
         <p:nvSpPr>
-          <p:cNvPr id="29" name="Shape 26"/>
+          <p:cNvPr id="34" name="Shape 31"/>
           <p:cNvSpPr/>
           <p:nvPr/>
         </p:nvSpPr>
@@ -2199,7 +2351,7 @@
       </p:sp>
       <p:sp>
         <p:nvSpPr>
-          <p:cNvPr id="30" name="Text 27"/>
+          <p:cNvPr id="35" name="Text 32"/>
           <p:cNvSpPr txBox="1"/>
           <p:nvPr/>
         </p:nvSpPr>
@@ -2382,7 +2534,7 @@
                           <a:ea typeface="Malgun Gothic" pitchFamily="34" charset="-122"/>
                           <a:cs typeface="Malgun Gothic" pitchFamily="34" charset="-120"/>
                         </a:rPr>
-                        <a:t>설계 문서</a:t>
+                        <a:t>설계 로직 문서</a:t>
                       </a:r>
                       <a:endParaRPr lang="en-US" sz="950" dirty="0">
                         <a:latin typeface="Malgun Gothic" charset="0"/>
@@ -2429,7 +2581,7 @@
                           <a:ea typeface="Malgun Gothic" pitchFamily="34" charset="-122"/>
                           <a:cs typeface="Malgun Gothic" pitchFamily="34" charset="-120"/>
                         </a:rPr>
-                        <a:t>설계변수·목적함수 정의, 값의 결정 근거, 검증 상태</a:t>
+                        <a:t>설계변수 구성 · 제약조건 · 처리 절차</a:t>
                       </a:r>
                       <a:endParaRPr lang="en-US" sz="950" dirty="0">
                         <a:latin typeface="Malgun Gothic" charset="0"/>
@@ -2670,7 +2822,7 @@
                           <a:ea typeface="Malgun Gothic" pitchFamily="34" charset="-122"/>
                           <a:cs typeface="Malgun Gothic" pitchFamily="34" charset="-120"/>
                         </a:rPr>
-                        <a:t>결과 요약</a:t>
+                        <a:t>인터페이스 규약</a:t>
                       </a:r>
                       <a:endParaRPr lang="en-US" sz="950" dirty="0">
                         <a:latin typeface="Malgun Gothic" charset="0"/>
@@ -2717,7 +2869,7 @@
                           <a:ea typeface="Malgun Gothic" pitchFamily="34" charset="-122"/>
                           <a:cs typeface="Malgun Gothic" pitchFamily="34" charset="-120"/>
                         </a:rPr>
-                        <a:t>파싱 후 정리된 해석 결과</a:t>
+                        <a:t>결과 파일 형식, API 호출 규약</a:t>
                       </a:r>
                       <a:endParaRPr lang="en-US" sz="950" dirty="0">
                         <a:latin typeface="Malgun Gothic" charset="0"/>
@@ -2754,7 +2906,7 @@
       </p:graphicFrame>
       <p:sp>
         <p:nvSpPr>
-          <p:cNvPr id="32" name="Text 28"/>
+          <p:cNvPr id="37" name="Text 33"/>
           <p:cNvSpPr txBox="1"/>
           <p:nvPr/>
         </p:nvSpPr>
@@ -2788,7 +2940,7 @@
                 <a:ea typeface="Malgun Gothic" pitchFamily="34" charset="-122"/>
                 <a:cs typeface="Malgun Gothic" pitchFamily="34" charset="-120"/>
               </a:rPr>
-              <a:t>매 세션 저장소를 읽어 이전 맥락을 그대로 이어받음 — 결정 근거가 사람과 AI 양쪽에 남음</a:t>
+              <a:t>코드 작성에 필요한 범위로 한정 — 매 세션 저장소를 읽어 이전 맥락을 그대로 이어받음</a:t>
             </a:r>
             <a:endParaRPr lang="en-US" sz="900" dirty="0"/>
           </a:p>
@@ -2796,7 +2948,7 @@
       </p:sp>
       <p:sp>
         <p:nvSpPr>
-          <p:cNvPr id="33" name="Shape 29"/>
+          <p:cNvPr id="38" name="Shape 34"/>
           <p:cNvSpPr/>
           <p:nvPr/>
         </p:nvSpPr>
@@ -2830,7 +2982,7 @@
       </p:sp>
       <p:sp>
         <p:nvSpPr>
-          <p:cNvPr id="34" name="Shape 30"/>
+          <p:cNvPr id="39" name="Shape 35"/>
           <p:cNvSpPr/>
           <p:nvPr/>
         </p:nvSpPr>
@@ -2855,7 +3007,7 @@
       </p:sp>
       <p:sp>
         <p:nvSpPr>
-          <p:cNvPr id="35" name="Text 31"/>
+          <p:cNvPr id="40" name="Text 36"/>
           <p:cNvSpPr txBox="1"/>
           <p:nvPr/>
         </p:nvSpPr>
@@ -3085,7 +3237,7 @@
                           <a:ea typeface="Malgun Gothic" pitchFamily="34" charset="-122"/>
                           <a:cs typeface="Malgun Gothic" pitchFamily="34" charset="-120"/>
                         </a:rPr>
-                        <a:t>형상·변수 구성 변경을 버전별 분기로 이력화</a:t>
+                        <a:t>코드·문서 변경을 버전별 분기로 이력화</a:t>
                       </a:r>
                       <a:endParaRPr lang="en-US" sz="950" dirty="0">
                         <a:latin typeface="Malgun Gothic" charset="0"/>
@@ -3230,7 +3382,7 @@
                           <a:ea typeface="Malgun Gothic" pitchFamily="34" charset="-122"/>
                           <a:cs typeface="Malgun Gothic" pitchFamily="34" charset="-120"/>
                         </a:rPr>
-                        <a:t>반출 범위</a:t>
+                        <a:t>반입 범위</a:t>
                       </a:r>
                       <a:endParaRPr lang="en-US" sz="950" dirty="0">
                         <a:latin typeface="Malgun Gothic" charset="0"/>
@@ -3277,7 +3429,7 @@
                           <a:ea typeface="Malgun Gothic" pitchFamily="34" charset="-122"/>
                           <a:cs typeface="Malgun Gothic" pitchFamily="34" charset="-120"/>
                         </a:rPr>
-                        <a:t>코드·문서 중심, 해석 원본 파일은 제외</a:t>
+                        <a:t>코드·문서만 내부망으로 반입</a:t>
                       </a:r>
                       <a:endParaRPr lang="en-US" sz="950" dirty="0">
                         <a:latin typeface="Malgun Gothic" charset="0"/>
@@ -3410,7 +3562,7 @@
       </p:graphicFrame>
       <p:sp>
         <p:nvSpPr>
-          <p:cNvPr id="37" name="Shape 32"/>
+          <p:cNvPr id="42" name="Shape 37"/>
           <p:cNvSpPr/>
           <p:nvPr/>
         </p:nvSpPr>
@@ -3432,7 +3584,7 @@
       </p:sp>
       <p:sp>
         <p:nvSpPr>
-          <p:cNvPr id="38" name="Text 33"/>
+          <p:cNvPr id="43" name="Text 38"/>
           <p:cNvSpPr txBox="1"/>
           <p:nvPr/>
         </p:nvSpPr>
@@ -3463,7 +3615,7 @@
                 <a:ea typeface="Malgun Gothic" pitchFamily="34" charset="-122"/>
                 <a:cs typeface="Malgun Gothic" pitchFamily="34" charset="-120"/>
               </a:rPr>
-              <a:t>망분리 환경에서도 저장소를 매개로 AI 협업 체계 구축</a:t>
+              <a:t>내부 자산을 반출하지 않고 AI 협업 체계 구축</a:t>
             </a:r>
             <a:endParaRPr lang="en-US" sz="1000" dirty="0"/>
           </a:p>
